--- a/Робота/Розклад.pptx
+++ b/Робота/Розклад.pptx
@@ -14,30 +14,18 @@
   <p:notesSz cx="6858000" cy="9144000"/>
   <p:embeddedFontLst>
     <p:embeddedFont>
-      <p:font typeface="Akrobat SemiBold" panose="00000700000000000000" pitchFamily="50" charset="-52"/>
+      <p:font typeface="Akrobat SemiBold" panose="00000700000000000000" charset="-52"/>
       <p:bold r:id="rId6"/>
     </p:embeddedFont>
     <p:embeddedFont>
-      <p:font typeface="Calibri" panose="020F0502020204030204" pitchFamily="34" charset="0"/>
-      <p:regular r:id="rId7"/>
-      <p:bold r:id="rId8"/>
-      <p:italic r:id="rId9"/>
-      <p:boldItalic r:id="rId10"/>
-    </p:embeddedFont>
-    <p:embeddedFont>
-      <p:font typeface="Calibri Light" panose="020F0302020204030204" pitchFamily="34" charset="0"/>
-      <p:regular r:id="rId11"/>
-      <p:italic r:id="rId12"/>
-    </p:embeddedFont>
-    <p:embeddedFont>
       <p:font typeface="Montserrat Black" panose="00000A00000000000000" pitchFamily="2" charset="-52"/>
-      <p:bold r:id="rId13"/>
-      <p:boldItalic r:id="rId14"/>
+      <p:bold r:id="rId7"/>
+      <p:boldItalic r:id="rId8"/>
     </p:embeddedFont>
     <p:embeddedFont>
       <p:font typeface="Montserrat SemiBold" panose="00000700000000000000" pitchFamily="2" charset="-52"/>
-      <p:bold r:id="rId15"/>
-      <p:boldItalic r:id="rId16"/>
+      <p:bold r:id="rId9"/>
+      <p:boldItalic r:id="rId10"/>
     </p:embeddedFont>
   </p:embeddedFontLst>
   <p:defaultTextStyle>
@@ -30306,10 +30294,10 @@
           <a:lstStyle/>
           <a:p>
             <a:r>
-              <a:rPr lang="en-US" sz="1400" dirty="0">
-                <a:latin typeface="Akrobat SemiBold" panose="00000700000000000000" pitchFamily="50" charset="-52"/>
-              </a:rPr>
-              <a:t>2</a:t>
+              <a:rPr lang="ru-RU" sz="1400" dirty="0">
+                <a:latin typeface="Akrobat SemiBold" panose="00000700000000000000" pitchFamily="50" charset="-52"/>
+              </a:rPr>
+              <a:t>1</a:t>
             </a:r>
             <a:r>
               <a:rPr lang="uk-UA" sz="1400" dirty="0">
@@ -30514,10 +30502,10 @@
           <a:lstStyle/>
           <a:p>
             <a:r>
-              <a:rPr lang="en-US" sz="1400" dirty="0">
-                <a:latin typeface="Akrobat SemiBold" panose="00000700000000000000" pitchFamily="50" charset="-52"/>
-              </a:rPr>
-              <a:t>2</a:t>
+              <a:rPr lang="ru-RU" sz="1400" dirty="0">
+                <a:latin typeface="Akrobat SemiBold" panose="00000700000000000000" pitchFamily="50" charset="-52"/>
+              </a:rPr>
+              <a:t>1</a:t>
             </a:r>
             <a:r>
               <a:rPr lang="uk-UA" sz="1400" dirty="0">
@@ -30618,10 +30606,10 @@
           <a:lstStyle/>
           <a:p>
             <a:r>
-              <a:rPr lang="en-US" sz="1400" dirty="0">
-                <a:latin typeface="Akrobat SemiBold" panose="00000700000000000000" pitchFamily="50" charset="-52"/>
-              </a:rPr>
-              <a:t>2</a:t>
+              <a:rPr lang="ru-RU" sz="1400" dirty="0">
+                <a:latin typeface="Akrobat SemiBold" panose="00000700000000000000" pitchFamily="50" charset="-52"/>
+              </a:rPr>
+              <a:t>1</a:t>
             </a:r>
             <a:r>
               <a:rPr lang="uk-UA" sz="1400" dirty="0">
